--- a/presentation/POD-Bench_성과발표.pptx
+++ b/presentation/POD-Bench_성과발표.pptx
@@ -8,30 +8,23 @@
     <p:notesMasterId r:id="rId78"/>
   </p:notesMasterIdLst>
   <p:sldIdLst>
-    <p:sldId id="256" r:id="rId9"/>
-    <p:sldId id="257" r:id="rId10"/>
-    <p:sldId id="258" r:id="rId11"/>
-    <p:sldId id="259" r:id="rId12"/>
-    <p:sldId id="260" r:id="rId13"/>
-    <p:sldId id="261" r:id="rId14"/>
-    <p:sldId id="262" r:id="rId15"/>
-    <p:sldId id="263" r:id="rId16"/>
-    <p:sldId id="264" r:id="rId17"/>
-    <p:sldId id="265" r:id="rId18"/>
-    <p:sldId id="266" r:id="rId19"/>
-    <p:sldId id="267" r:id="rId20"/>
-    <p:sldId id="268" r:id="rId21"/>
-    <p:sldId id="269" r:id="rId22"/>
+    <p:sldId id="256" r:id="rId7"/>
+    <p:sldId id="257" r:id="rId8"/>
+    <p:sldId id="258" r:id="rId9"/>
+    <p:sldId id="259" r:id="rId10"/>
+    <p:sldId id="260" r:id="rId11"/>
+    <p:sldId id="261" r:id="rId12"/>
+    <p:sldId id="262" r:id="rId13"/>
+    <p:sldId id="263" r:id="rId14"/>
+    <p:sldId id="264" r:id="rId15"/>
+    <p:sldId id="265" r:id="rId16"/>
+    <p:sldId id="266" r:id="rId17"/>
+    <p:sldId id="267" r:id="rId18"/>
+    <p:sldId id="268" r:id="rId19"/>
+    <p:sldId id="269" r:id="rId20"/>
   </p:sldIdLst>
   <p:sldSz cx="9906000" cy="6858000" type="A4"/>
   <p:notesSz cx="6858000" cy="9144000"/>
-  <p:embeddedFontLst>
-    <p:embeddedFont>
-      <p:font typeface="맑은 고딕" panose="020B0503020000020004" pitchFamily="50" charset="-127"/>
-      <p:regular r:id="rId79"/>
-      <p:bold r:id="rId80"/>
-    </p:embeddedFont>
-  </p:embeddedFontLst>
   <p:defaultTextStyle>
     <a:defPPr>
       <a:defRPr lang="ko-KR"/>
